--- a/Task6/Лабораторная работа №6.pptx
+++ b/Task6/Лабораторная работа №6.pptx
@@ -203,7 +203,7 @@
           <a:p>
             <a:fld id="{982DCA59-51AA-4717-BF4A-177FB90EC27E}" type="datetimeFigureOut">
               <a:rPr lang="ru-RU" smtClean="0"/>
-              <a:t>15.04.2026</a:t>
+              <a:t>16.04.2026</a:t>
             </a:fld>
             <a:endParaRPr lang="ru-RU"/>
           </a:p>
@@ -620,7 +620,7 @@
           <a:p>
             <a:fld id="{B34A1B2A-88E9-41C6-ADDD-B3B0ECF6CD4A}" type="datetime1">
               <a:rPr lang="ru-RU" smtClean="0"/>
-              <a:t>15.04.2026</a:t>
+              <a:t>16.04.2026</a:t>
             </a:fld>
             <a:endParaRPr lang="ru-RU"/>
           </a:p>
@@ -820,7 +820,7 @@
           <a:p>
             <a:fld id="{35B4598E-39A0-4499-B681-3910AD4163EA}" type="datetime1">
               <a:rPr lang="ru-RU" smtClean="0"/>
-              <a:t>15.04.2026</a:t>
+              <a:t>16.04.2026</a:t>
             </a:fld>
             <a:endParaRPr lang="ru-RU"/>
           </a:p>
@@ -1030,7 +1030,7 @@
           <a:p>
             <a:fld id="{38E1D412-F844-4D5F-BEB0-B16AF876AB34}" type="datetime1">
               <a:rPr lang="ru-RU" smtClean="0"/>
-              <a:t>15.04.2026</a:t>
+              <a:t>16.04.2026</a:t>
             </a:fld>
             <a:endParaRPr lang="ru-RU"/>
           </a:p>
@@ -1230,7 +1230,7 @@
           <a:p>
             <a:fld id="{E61DBA3D-0B35-42DF-90EE-AC95B649311D}" type="datetime1">
               <a:rPr lang="ru-RU" smtClean="0"/>
-              <a:t>15.04.2026</a:t>
+              <a:t>16.04.2026</a:t>
             </a:fld>
             <a:endParaRPr lang="ru-RU"/>
           </a:p>
@@ -1506,7 +1506,7 @@
           <a:p>
             <a:fld id="{C259A9D5-C857-4AFF-933C-A6D6DB6026D5}" type="datetime1">
               <a:rPr lang="ru-RU" smtClean="0"/>
-              <a:t>15.04.2026</a:t>
+              <a:t>16.04.2026</a:t>
             </a:fld>
             <a:endParaRPr lang="ru-RU"/>
           </a:p>
@@ -1774,7 +1774,7 @@
           <a:p>
             <a:fld id="{D87772AA-D128-42F3-9526-953858CDE727}" type="datetime1">
               <a:rPr lang="ru-RU" smtClean="0"/>
-              <a:t>15.04.2026</a:t>
+              <a:t>16.04.2026</a:t>
             </a:fld>
             <a:endParaRPr lang="ru-RU"/>
           </a:p>
@@ -2189,7 +2189,7 @@
           <a:p>
             <a:fld id="{57DDEC1A-7206-4ACB-88CC-4D580494CFD8}" type="datetime1">
               <a:rPr lang="ru-RU" smtClean="0"/>
-              <a:t>15.04.2026</a:t>
+              <a:t>16.04.2026</a:t>
             </a:fld>
             <a:endParaRPr lang="ru-RU"/>
           </a:p>
@@ -2331,7 +2331,7 @@
           <a:p>
             <a:fld id="{61E66A41-B699-420A-89B7-1360021CE64F}" type="datetime1">
               <a:rPr lang="ru-RU" smtClean="0"/>
-              <a:t>15.04.2026</a:t>
+              <a:t>16.04.2026</a:t>
             </a:fld>
             <a:endParaRPr lang="ru-RU"/>
           </a:p>
@@ -2444,7 +2444,7 @@
           <a:p>
             <a:fld id="{C9983745-FF14-4267-8CE3-5B5166319872}" type="datetime1">
               <a:rPr lang="ru-RU" smtClean="0"/>
-              <a:t>15.04.2026</a:t>
+              <a:t>16.04.2026</a:t>
             </a:fld>
             <a:endParaRPr lang="ru-RU"/>
           </a:p>
@@ -2757,7 +2757,7 @@
           <a:p>
             <a:fld id="{69C32D68-E935-40A0-A15C-328BCC7A62F5}" type="datetime1">
               <a:rPr lang="ru-RU" smtClean="0"/>
-              <a:t>15.04.2026</a:t>
+              <a:t>16.04.2026</a:t>
             </a:fld>
             <a:endParaRPr lang="ru-RU"/>
           </a:p>
@@ -3046,7 +3046,7 @@
           <a:p>
             <a:fld id="{20BE0BEA-9C6C-4843-891D-C389990A7C5F}" type="datetime1">
               <a:rPr lang="ru-RU" smtClean="0"/>
-              <a:t>15.04.2026</a:t>
+              <a:t>16.04.2026</a:t>
             </a:fld>
             <a:endParaRPr lang="ru-RU"/>
           </a:p>
@@ -3289,7 +3289,7 @@
           <a:p>
             <a:fld id="{FBFCCD74-3F4F-4664-BDCE-83D9D19648C6}" type="datetime1">
               <a:rPr lang="ru-RU" smtClean="0"/>
-              <a:t>15.04.2026</a:t>
+              <a:t>16.04.2026</a:t>
             </a:fld>
             <a:endParaRPr lang="ru-RU"/>
           </a:p>
@@ -4271,7 +4271,7 @@
         </p:spPr>
         <p:txBody>
           <a:bodyPr>
-            <a:normAutofit fontScale="92500"/>
+            <a:normAutofit lnSpcReduction="10000"/>
           </a:bodyPr>
           <a:lstStyle/>
           <a:p>
@@ -4370,7 +4370,21 @@
                 <a:latin typeface="Times New Roman" panose="02020603050405020304" pitchFamily="18" charset="0"/>
                 <a:cs typeface="Times New Roman" panose="02020603050405020304" pitchFamily="18" charset="0"/>
               </a:rPr>
-              <a:t>число с необязательным нулем и вторая цифра от 1 до 9 или 1 со второй цифрой от 0 до 2.</a:t>
+              <a:t>число </a:t>
+            </a:r>
+            <a:r>
+              <a:rPr lang="ru-RU" sz="1800">
+                <a:latin typeface="Times New Roman" panose="02020603050405020304" pitchFamily="18" charset="0"/>
+                <a:cs typeface="Times New Roman" panose="02020603050405020304" pitchFamily="18" charset="0"/>
+              </a:rPr>
+              <a:t>с нулем </a:t>
+            </a:r>
+            <a:r>
+              <a:rPr lang="ru-RU" sz="1800" dirty="0">
+                <a:latin typeface="Times New Roman" panose="02020603050405020304" pitchFamily="18" charset="0"/>
+                <a:cs typeface="Times New Roman" panose="02020603050405020304" pitchFamily="18" charset="0"/>
+              </a:rPr>
+              <a:t>и вторая цифра от 1 до 9 или 1 со второй цифрой от 0 до 2.</a:t>
             </a:r>
           </a:p>
           <a:p>

--- a/Task6/Лабораторная работа №6.pptx
+++ b/Task6/Лабораторная работа №6.pptx
@@ -3888,11 +3888,18 @@
           <a:lstStyle/>
           <a:p>
             <a:r>
+              <a:rPr lang="ru-RU">
+                <a:latin typeface="Times New Roman" panose="02020603050405020304" pitchFamily="18" charset="0"/>
+                <a:cs typeface="Times New Roman" panose="02020603050405020304" pitchFamily="18" charset="0"/>
+              </a:rPr>
+              <a:t>Регулярные </a:t>
+            </a:r>
+            <a:r>
               <a:rPr lang="ru-RU" dirty="0">
                 <a:latin typeface="Times New Roman" panose="02020603050405020304" pitchFamily="18" charset="0"/>
                 <a:cs typeface="Times New Roman" panose="02020603050405020304" pitchFamily="18" charset="0"/>
               </a:rPr>
-              <a:t>Регуляярные выражения</a:t>
+              <a:t>выражения</a:t>
             </a:r>
             <a:r>
               <a:rPr lang="en-US" dirty="0">

--- a/Task6/Лабораторная работа №6.pptx
+++ b/Task6/Лабораторная работа №6.pptx
@@ -203,7 +203,7 @@
           <a:p>
             <a:fld id="{982DCA59-51AA-4717-BF4A-177FB90EC27E}" type="datetimeFigureOut">
               <a:rPr lang="ru-RU" smtClean="0"/>
-              <a:t>16.04.2026</a:t>
+              <a:t>23.04.2026</a:t>
             </a:fld>
             <a:endParaRPr lang="ru-RU"/>
           </a:p>
@@ -620,7 +620,7 @@
           <a:p>
             <a:fld id="{B34A1B2A-88E9-41C6-ADDD-B3B0ECF6CD4A}" type="datetime1">
               <a:rPr lang="ru-RU" smtClean="0"/>
-              <a:t>16.04.2026</a:t>
+              <a:t>23.04.2026</a:t>
             </a:fld>
             <a:endParaRPr lang="ru-RU"/>
           </a:p>
@@ -820,7 +820,7 @@
           <a:p>
             <a:fld id="{35B4598E-39A0-4499-B681-3910AD4163EA}" type="datetime1">
               <a:rPr lang="ru-RU" smtClean="0"/>
-              <a:t>16.04.2026</a:t>
+              <a:t>23.04.2026</a:t>
             </a:fld>
             <a:endParaRPr lang="ru-RU"/>
           </a:p>
@@ -1030,7 +1030,7 @@
           <a:p>
             <a:fld id="{38E1D412-F844-4D5F-BEB0-B16AF876AB34}" type="datetime1">
               <a:rPr lang="ru-RU" smtClean="0"/>
-              <a:t>16.04.2026</a:t>
+              <a:t>23.04.2026</a:t>
             </a:fld>
             <a:endParaRPr lang="ru-RU"/>
           </a:p>
@@ -1230,7 +1230,7 @@
           <a:p>
             <a:fld id="{E61DBA3D-0B35-42DF-90EE-AC95B649311D}" type="datetime1">
               <a:rPr lang="ru-RU" smtClean="0"/>
-              <a:t>16.04.2026</a:t>
+              <a:t>23.04.2026</a:t>
             </a:fld>
             <a:endParaRPr lang="ru-RU"/>
           </a:p>
@@ -1506,7 +1506,7 @@
           <a:p>
             <a:fld id="{C259A9D5-C857-4AFF-933C-A6D6DB6026D5}" type="datetime1">
               <a:rPr lang="ru-RU" smtClean="0"/>
-              <a:t>16.04.2026</a:t>
+              <a:t>23.04.2026</a:t>
             </a:fld>
             <a:endParaRPr lang="ru-RU"/>
           </a:p>
@@ -1774,7 +1774,7 @@
           <a:p>
             <a:fld id="{D87772AA-D128-42F3-9526-953858CDE727}" type="datetime1">
               <a:rPr lang="ru-RU" smtClean="0"/>
-              <a:t>16.04.2026</a:t>
+              <a:t>23.04.2026</a:t>
             </a:fld>
             <a:endParaRPr lang="ru-RU"/>
           </a:p>
@@ -2189,7 +2189,7 @@
           <a:p>
             <a:fld id="{57DDEC1A-7206-4ACB-88CC-4D580494CFD8}" type="datetime1">
               <a:rPr lang="ru-RU" smtClean="0"/>
-              <a:t>16.04.2026</a:t>
+              <a:t>23.04.2026</a:t>
             </a:fld>
             <a:endParaRPr lang="ru-RU"/>
           </a:p>
@@ -2331,7 +2331,7 @@
           <a:p>
             <a:fld id="{61E66A41-B699-420A-89B7-1360021CE64F}" type="datetime1">
               <a:rPr lang="ru-RU" smtClean="0"/>
-              <a:t>16.04.2026</a:t>
+              <a:t>23.04.2026</a:t>
             </a:fld>
             <a:endParaRPr lang="ru-RU"/>
           </a:p>
@@ -2444,7 +2444,7 @@
           <a:p>
             <a:fld id="{C9983745-FF14-4267-8CE3-5B5166319872}" type="datetime1">
               <a:rPr lang="ru-RU" smtClean="0"/>
-              <a:t>16.04.2026</a:t>
+              <a:t>23.04.2026</a:t>
             </a:fld>
             <a:endParaRPr lang="ru-RU"/>
           </a:p>
@@ -2757,7 +2757,7 @@
           <a:p>
             <a:fld id="{69C32D68-E935-40A0-A15C-328BCC7A62F5}" type="datetime1">
               <a:rPr lang="ru-RU" smtClean="0"/>
-              <a:t>16.04.2026</a:t>
+              <a:t>23.04.2026</a:t>
             </a:fld>
             <a:endParaRPr lang="ru-RU"/>
           </a:p>
@@ -3046,7 +3046,7 @@
           <a:p>
             <a:fld id="{20BE0BEA-9C6C-4843-891D-C389990A7C5F}" type="datetime1">
               <a:rPr lang="ru-RU" smtClean="0"/>
-              <a:t>16.04.2026</a:t>
+              <a:t>23.04.2026</a:t>
             </a:fld>
             <a:endParaRPr lang="ru-RU"/>
           </a:p>
@@ -3289,7 +3289,7 @@
           <a:p>
             <a:fld id="{FBFCCD74-3F4F-4664-BDCE-83D9D19648C6}" type="datetime1">
               <a:rPr lang="ru-RU" smtClean="0"/>
-              <a:t>16.04.2026</a:t>
+              <a:t>23.04.2026</a:t>
             </a:fld>
             <a:endParaRPr lang="ru-RU"/>
           </a:p>
@@ -4552,12 +4552,84 @@
           </a:p>
         </p:txBody>
       </p:sp>
+      <p:sp>
+        <p:nvSpPr>
+          <p:cNvPr id="14" name="TextBox 13">
+            <a:extLst>
+              <a:ext uri="{FF2B5EF4-FFF2-40B4-BE49-F238E27FC236}">
+                <a16:creationId xmlns:a16="http://schemas.microsoft.com/office/drawing/2014/main" id="{2B800E30-CB32-08C9-9B5C-249AE1ABD1DC}"/>
+              </a:ext>
+            </a:extLst>
+          </p:cNvPr>
+          <p:cNvSpPr txBox="1"/>
+          <p:nvPr/>
+        </p:nvSpPr>
+        <p:spPr>
+          <a:xfrm>
+            <a:off x="5000324" y="5126467"/>
+            <a:ext cx="6274883" cy="1754326"/>
+          </a:xfrm>
+          <a:prstGeom prst="rect">
+            <a:avLst/>
+          </a:prstGeom>
+          <a:noFill/>
+        </p:spPr>
+        <p:txBody>
+          <a:bodyPr wrap="square" rtlCol="0">
+            <a:spAutoFit/>
+          </a:bodyPr>
+          <a:lstStyle/>
+          <a:p>
+            <a:r>
+              <a:rPr lang="ru-RU" dirty="0">
+                <a:latin typeface="Times New Roman" panose="02020603050405020304" pitchFamily="18" charset="0"/>
+                <a:cs typeface="Times New Roman" panose="02020603050405020304" pitchFamily="18" charset="0"/>
+              </a:rPr>
+              <a:t>На</a:t>
+            </a:r>
+            <a:r>
+              <a:rPr lang="en-US" dirty="0">
+                <a:latin typeface="Times New Roman" panose="02020603050405020304" pitchFamily="18" charset="0"/>
+                <a:cs typeface="Times New Roman" panose="02020603050405020304" pitchFamily="18" charset="0"/>
+              </a:rPr>
+              <a:t> </a:t>
+            </a:r>
+            <a:r>
+              <a:rPr lang="ru-RU" dirty="0">
+                <a:latin typeface="Times New Roman" panose="02020603050405020304" pitchFamily="18" charset="0"/>
+                <a:cs typeface="Times New Roman" panose="02020603050405020304" pitchFamily="18" charset="0"/>
+              </a:rPr>
+              <a:t>паттерне №5 остановимся подробнее, так как нам надо исключить попадания координат вместе с датами. Добавим негативную проверку:</a:t>
+            </a:r>
+            <a:br>
+              <a:rPr lang="ru-RU" dirty="0">
+                <a:latin typeface="Times New Roman" panose="02020603050405020304" pitchFamily="18" charset="0"/>
+                <a:cs typeface="Times New Roman" panose="02020603050405020304" pitchFamily="18" charset="0"/>
+              </a:rPr>
+            </a:br>
+            <a:r>
+              <a:rPr lang="en-US" dirty="0">
+                <a:latin typeface="Times New Roman" panose="02020603050405020304" pitchFamily="18" charset="0"/>
+                <a:cs typeface="Times New Roman" panose="02020603050405020304" pitchFamily="18" charset="0"/>
+              </a:rPr>
+              <a:t>(?&lt;!\d|.)</a:t>
+            </a:r>
+            <a:r>
+              <a:rPr lang="ru-RU" dirty="0">
+                <a:latin typeface="Times New Roman" panose="02020603050405020304" pitchFamily="18" charset="0"/>
+                <a:cs typeface="Times New Roman" panose="02020603050405020304" pitchFamily="18" charset="0"/>
+              </a:rPr>
+              <a:t> – она говорит что перед нашим днем не должно идти числа или точки. В конце берем опционально наличие года(состоит из 2 до 4 цифр) и добавляем ту же проверку.</a:t>
+            </a:r>
+          </a:p>
+        </p:txBody>
+      </p:sp>
       <p:pic>
         <p:nvPicPr>
-          <p:cNvPr id="13" name="Рисунок 12">
-            <a:extLst>
-              <a:ext uri="{FF2B5EF4-FFF2-40B4-BE49-F238E27FC236}">
-                <a16:creationId xmlns:a16="http://schemas.microsoft.com/office/drawing/2014/main" id="{B1AC6DDA-C91F-3B8B-AB25-3AF3034708BF}"/>
+          <p:cNvPr id="5" name="Рисунок 4">
+            <a:extLst>
+              <a:ext uri="{FF2B5EF4-FFF2-40B4-BE49-F238E27FC236}">
+                <a16:creationId xmlns:a16="http://schemas.microsoft.com/office/drawing/2014/main" id="{2922E280-E042-A770-A984-ED447AD77E29}"/>
               </a:ext>
             </a:extLst>
           </p:cNvPr>
@@ -4574,86 +4646,14 @@
         </p:blipFill>
         <p:spPr>
           <a:xfrm>
-            <a:off x="5889581" y="136525"/>
-            <a:ext cx="5009160" cy="4997283"/>
+            <a:off x="5378918" y="85824"/>
+            <a:ext cx="5179207" cy="5040643"/>
           </a:xfrm>
           <a:prstGeom prst="rect">
             <a:avLst/>
           </a:prstGeom>
         </p:spPr>
       </p:pic>
-      <p:sp>
-        <p:nvSpPr>
-          <p:cNvPr id="14" name="TextBox 13">
-            <a:extLst>
-              <a:ext uri="{FF2B5EF4-FFF2-40B4-BE49-F238E27FC236}">
-                <a16:creationId xmlns:a16="http://schemas.microsoft.com/office/drawing/2014/main" id="{2B800E30-CB32-08C9-9B5C-249AE1ABD1DC}"/>
-              </a:ext>
-            </a:extLst>
-          </p:cNvPr>
-          <p:cNvSpPr txBox="1"/>
-          <p:nvPr/>
-        </p:nvSpPr>
-        <p:spPr>
-          <a:xfrm>
-            <a:off x="5000324" y="5126467"/>
-            <a:ext cx="6274883" cy="1754326"/>
-          </a:xfrm>
-          <a:prstGeom prst="rect">
-            <a:avLst/>
-          </a:prstGeom>
-          <a:noFill/>
-        </p:spPr>
-        <p:txBody>
-          <a:bodyPr wrap="square" rtlCol="0">
-            <a:spAutoFit/>
-          </a:bodyPr>
-          <a:lstStyle/>
-          <a:p>
-            <a:r>
-              <a:rPr lang="ru-RU" dirty="0">
-                <a:latin typeface="Times New Roman" panose="02020603050405020304" pitchFamily="18" charset="0"/>
-                <a:cs typeface="Times New Roman" panose="02020603050405020304" pitchFamily="18" charset="0"/>
-              </a:rPr>
-              <a:t>На</a:t>
-            </a:r>
-            <a:r>
-              <a:rPr lang="en-US" dirty="0">
-                <a:latin typeface="Times New Roman" panose="02020603050405020304" pitchFamily="18" charset="0"/>
-                <a:cs typeface="Times New Roman" panose="02020603050405020304" pitchFamily="18" charset="0"/>
-              </a:rPr>
-              <a:t> </a:t>
-            </a:r>
-            <a:r>
-              <a:rPr lang="ru-RU" dirty="0">
-                <a:latin typeface="Times New Roman" panose="02020603050405020304" pitchFamily="18" charset="0"/>
-                <a:cs typeface="Times New Roman" panose="02020603050405020304" pitchFamily="18" charset="0"/>
-              </a:rPr>
-              <a:t>паттерне №5 остановимся подробнее, так как нам надо исключить попадания координат вместе с датами. Добавим негативную проверку:</a:t>
-            </a:r>
-            <a:br>
-              <a:rPr lang="ru-RU" dirty="0">
-                <a:latin typeface="Times New Roman" panose="02020603050405020304" pitchFamily="18" charset="0"/>
-                <a:cs typeface="Times New Roman" panose="02020603050405020304" pitchFamily="18" charset="0"/>
-              </a:rPr>
-            </a:br>
-            <a:r>
-              <a:rPr lang="en-US" dirty="0">
-                <a:latin typeface="Times New Roman" panose="02020603050405020304" pitchFamily="18" charset="0"/>
-                <a:cs typeface="Times New Roman" panose="02020603050405020304" pitchFamily="18" charset="0"/>
-              </a:rPr>
-              <a:t>(?&lt;!\d|.)</a:t>
-            </a:r>
-            <a:r>
-              <a:rPr lang="ru-RU" dirty="0">
-                <a:latin typeface="Times New Roman" panose="02020603050405020304" pitchFamily="18" charset="0"/>
-                <a:cs typeface="Times New Roman" panose="02020603050405020304" pitchFamily="18" charset="0"/>
-              </a:rPr>
-              <a:t> – она говорит что перед нашим днем не должно идти числа или точки. В конце берем опционально наличие года(состоит из 2 до 4 цифр) и добавляем ту же проверку.</a:t>
-            </a:r>
-          </a:p>
-        </p:txBody>
-      </p:sp>
     </p:spTree>
     <p:extLst>
       <p:ext uri="{BB962C8B-B14F-4D97-AF65-F5344CB8AC3E}">
@@ -4841,10 +4841,10 @@
       </p:sp>
       <p:pic>
         <p:nvPicPr>
-          <p:cNvPr id="9" name="Рисунок 8">
-            <a:extLst>
-              <a:ext uri="{FF2B5EF4-FFF2-40B4-BE49-F238E27FC236}">
-                <a16:creationId xmlns:a16="http://schemas.microsoft.com/office/drawing/2014/main" id="{AB82FE1A-80C1-BEBF-6A5F-5CDD0344A554}"/>
+          <p:cNvPr id="5" name="Рисунок 4">
+            <a:extLst>
+              <a:ext uri="{FF2B5EF4-FFF2-40B4-BE49-F238E27FC236}">
+                <a16:creationId xmlns:a16="http://schemas.microsoft.com/office/drawing/2014/main" id="{A899BF3B-80CD-A747-E1CD-EB3258FB0B3F}"/>
               </a:ext>
             </a:extLst>
           </p:cNvPr>
@@ -4861,8 +4861,8 @@
         </p:blipFill>
         <p:spPr>
           <a:xfrm>
-            <a:off x="8463543" y="177983"/>
-            <a:ext cx="1948535" cy="6287068"/>
+            <a:off x="8610600" y="162678"/>
+            <a:ext cx="1960752" cy="6241982"/>
           </a:xfrm>
           <a:prstGeom prst="rect">
             <a:avLst/>
